--- a/smoke_samples/animations.pptx
+++ b/smoke_samples/animations.pptx
@@ -232,7 +232,7 @@
         <p:spPr>
           <a:xfrm>
             <a:off x="457200" y="274638"/>
-            <a:ext cx="8230200" cy="1143000"/>
+            <a:ext cx="8229600" cy="1143000"/>
           </a:xfrm>
           <a:prstGeom prst="rect">
             <a:avLst/>
@@ -245,7 +245,7 @@
           <a:p>
             <a:pPr algn="l"/>
             <a:r>
-              <a:rPr lang="en-US" sz="4400" b="1" i="0" dirty="0"/>
+              <a:rPr lang="en-US" sz="4400" b="0" i="0" u="none" dirty="0"/>
               <a:t>Animations &amp; Transitions Demo</a:t>
             </a:r>
           </a:p>
@@ -260,7 +260,7 @@
         <p:spPr>
           <a:xfrm>
             <a:off x="457200" y="1600200"/>
-            <a:ext cx="8230200" cy="4572000"/>
+            <a:ext cx="8229600" cy="4572000"/>
           </a:xfrm>
           <a:prstGeom prst="rect">
             <a:avLst/>
@@ -268,15 +268,15 @@
           <a:noFill/>
         </p:spPr>
         <p:txBody>
-          <a:bodyPr wrap="square" rtlCol="0"/>
+          <a:bodyPr wrap="square" rtlCol="0" anchor="t"/>
           <a:lstStyle/>
           <a:p>
             <a:pPr lvl="0" marL="457200" indent="-457200">
               <a:buChar char="•"/>
             </a:pPr>
             <a:r>
-              <a:rPr lang="en-US" sz="2800" b="0" i="0" dirty="0"/>
-              <a:t>This presentation demonstrates new features in goppt.</a:t>
+              <a:rPr lang="en-US" sz="1800" b="0" i="0" u="none" dirty="0"/>
+              <a:t>This presentation demonstrates new features in gopptx.</a:t>
             </a:r>
           </a:p>
           <a:p>
@@ -284,7 +284,7 @@
               <a:buChar char="•"/>
             </a:pPr>
             <a:r>
-              <a:rPr lang="en-US" sz="2800" b="0" i="0" dirty="0"/>
+              <a:rPr lang="en-US" sz="1800" b="0" i="0" u="none" dirty="0"/>
               <a:t>Slide Transitions</a:t>
             </a:r>
           </a:p>
@@ -293,7 +293,7 @@
               <a:buChar char="•"/>
             </a:pPr>
             <a:r>
-              <a:rPr lang="en-US" sz="2800" b="0" i="0" dirty="0"/>
+              <a:rPr lang="en-US" sz="1800" b="0" i="0" u="none" dirty="0"/>
               <a:t>Shape Animations</a:t>
             </a:r>
           </a:p>
@@ -338,7 +338,7 @@
         <p:spPr>
           <a:xfrm>
             <a:off x="457200" y="274638"/>
-            <a:ext cx="8230200" cy="1143000"/>
+            <a:ext cx="8229600" cy="1143000"/>
           </a:xfrm>
           <a:prstGeom prst="rect">
             <a:avLst/>
@@ -351,7 +351,7 @@
           <a:p>
             <a:pPr algn="l"/>
             <a:r>
-              <a:rPr lang="en-US" sz="4400" b="1" i="0" dirty="0"/>
+              <a:rPr lang="en-US" sz="4400" b="0" i="0" u="none" dirty="0"/>
               <a:t>Transition: Push Right (1s)</a:t>
             </a:r>
           </a:p>
@@ -366,7 +366,7 @@
         <p:spPr>
           <a:xfrm>
             <a:off x="457200" y="1600200"/>
-            <a:ext cx="8230200" cy="4572000"/>
+            <a:ext cx="8229600" cy="4572000"/>
           </a:xfrm>
           <a:prstGeom prst="rect">
             <a:avLst/>
@@ -374,14 +374,14 @@
           <a:noFill/>
         </p:spPr>
         <p:txBody>
-          <a:bodyPr wrap="square" rtlCol="0"/>
+          <a:bodyPr wrap="square" rtlCol="0" anchor="t"/>
           <a:lstStyle/>
           <a:p>
             <a:pPr lvl="0" marL="457200" indent="-457200">
               <a:buChar char="•"/>
             </a:pPr>
             <a:r>
-              <a:rPr lang="en-US" sz="2800" b="0" i="0" dirty="0"/>
+              <a:rPr lang="en-US" sz="1800" b="0" i="0" u="none" dirty="0"/>
               <a:t>This slide entered with a Push Right transition.</a:t>
             </a:r>
           </a:p>
@@ -390,7 +390,7 @@
               <a:buChar char="•"/>
             </a:pPr>
             <a:r>
-              <a:rPr lang="en-US" sz="2800" b="0" i="0" dirty="0"/>
+              <a:rPr lang="en-US" sz="1800" b="0" i="0" u="none" dirty="0"/>
               <a:t>Duration: 1000ms</a:t>
             </a:r>
           </a:p>
@@ -401,7 +401,7 @@
   <p:clrMapOvr>
     <a:masterClrMapping/>
   </p:clrMapOvr>
-  <p:transition>
+  <p:transition dur="1000">
     <p:push dir="r"/>
   </p:transition>
 </p:sld>
@@ -438,7 +438,7 @@
         <p:spPr>
           <a:xfrm>
             <a:off x="457200" y="274638"/>
-            <a:ext cx="8230200" cy="1143000"/>
+            <a:ext cx="8229600" cy="1143000"/>
           </a:xfrm>
           <a:prstGeom prst="rect">
             <a:avLst/>
@@ -451,7 +451,7 @@
           <a:p>
             <a:pPr algn="l"/>
             <a:r>
-              <a:rPr lang="en-US" sz="4400" b="1" i="0" dirty="0"/>
+              <a:rPr lang="en-US" sz="4400" b="0" i="0" u="none" dirty="0"/>
               <a:t>Animations Demo</a:t>
             </a:r>
           </a:p>
@@ -476,7 +476,7 @@
           </a:solidFill>
         </p:spPr>
         <p:txBody>
-          <a:bodyPr wrap="square" rtlCol="0" anchor="ctr">
+          <a:bodyPr wrap="square" rtlCol="0" anchor="ctr" marL="45720" marT="45720" marR="45720" marB="45720">
             <a:spAutoFit/>
           </a:bodyPr>
           <a:lstStyle/>
@@ -512,7 +512,7 @@
           </a:solidFill>
         </p:spPr>
         <p:txBody>
-          <a:bodyPr wrap="square" rtlCol="0" anchor="ctr">
+          <a:bodyPr wrap="square" rtlCol="0" anchor="ctr" marL="45720" marT="45720" marR="45720" marB="45720">
             <a:spAutoFit/>
           </a:bodyPr>
           <a:lstStyle/>
@@ -548,7 +548,7 @@
           </a:solidFill>
         </p:spPr>
         <p:txBody>
-          <a:bodyPr wrap="square" rtlCol="0" anchor="ctr">
+          <a:bodyPr wrap="square" rtlCol="0" anchor="ctr" marL="45720" marT="45720" marR="45720" marB="45720">
             <a:spAutoFit/>
           </a:bodyPr>
           <a:lstStyle/>
@@ -600,7 +600,7 @@
                     </p:cTn>
                   </p:par>
                   <p:par>
-                    <p:cTn id="5" presetID="2" presetClass="entr" presetSubtype="0" fill="hold" nodeType="afterEffect">
+                    <p:cTn id="5" presetID="2" presetClass="entr" presetSubtype="8" fill="hold" nodeType="afterEffect">
                       <p:stCondLst>
                         <p:cond delay="0"/>
                       </p:stCondLst>
@@ -683,7 +683,7 @@
         <p:spPr>
           <a:xfrm>
             <a:off x="457200" y="274638"/>
-            <a:ext cx="8230200" cy="1143000"/>
+            <a:ext cx="8229600" cy="1143000"/>
           </a:xfrm>
           <a:prstGeom prst="rect">
             <a:avLst/>
@@ -696,7 +696,7 @@
           <a:p>
             <a:pPr algn="l"/>
             <a:r>
-              <a:rPr lang="en-US" sz="4400" b="1" i="0" dirty="0"/>
+              <a:rPr lang="en-US" sz="4400" b="0" i="0" u="none" dirty="0"/>
               <a:t>End of Demo</a:t>
             </a:r>
           </a:p>
@@ -711,7 +711,7 @@
         <p:spPr>
           <a:xfrm>
             <a:off x="457200" y="1600200"/>
-            <a:ext cx="8230200" cy="4572000"/>
+            <a:ext cx="8229600" cy="4572000"/>
           </a:xfrm>
           <a:prstGeom prst="rect">
             <a:avLst/>
@@ -719,14 +719,14 @@
           <a:noFill/>
         </p:spPr>
         <p:txBody>
-          <a:bodyPr wrap="square" rtlCol="0"/>
+          <a:bodyPr wrap="square" rtlCol="0" anchor="t"/>
           <a:lstStyle/>
           <a:p>
             <a:pPr lvl="0" marL="457200" indent="-457200">
               <a:buChar char="•"/>
             </a:pPr>
             <a:r>
-              <a:rPr lang="en-US" sz="2800" b="0" i="0" dirty="0"/>
+              <a:rPr lang="en-US" sz="1800" b="0" i="0" u="none" dirty="0"/>
               <a:t>Thank you!</a:t>
             </a:r>
           </a:p>
